--- a/assets/ppts/M3.8_Mobile_IP_Architecture.pptx
+++ b/assets/ppts/M3.8_Mobile_IP_Architecture.pptx
@@ -8,6 +8,7 @@
     <p:sldId id="256" r:id="rId7"/>
     <p:sldId id="257" r:id="rId8"/>
     <p:sldId id="258" r:id="rId9"/>
+    <p:sldId id="259" r:id="rId10"/>
   </p:sldIdLst>
   <p:sldSz cx="12191695" cy="6858000" type="screen4x3"/>
   <p:notesSz cx="6858000" cy="9144000"/>
@@ -3141,8 +3142,8 @@
         </p:nvSpPr>
         <p:spPr>
           <a:xfrm>
-            <a:off x="822960" y="1188720"/>
-            <a:ext cx="164592" cy="4480560"/>
+            <a:off x="0" y="0"/>
+            <a:ext cx="12191695" cy="137160"/>
           </a:xfrm>
           <a:prstGeom prst="rect">
             <a:avLst/>
@@ -3178,14 +3179,57 @@
       </p:sp>
       <p:sp>
         <p:nvSpPr>
-          <p:cNvPr id="4" name="TextBox 3"/>
+          <p:cNvPr id="4" name="Rectangle 3"/>
+          <p:cNvSpPr/>
+          <p:nvPr/>
+        </p:nvSpPr>
+        <p:spPr>
+          <a:xfrm>
+            <a:off x="822960" y="1097280"/>
+            <a:ext cx="164592" cy="4663440"/>
+          </a:xfrm>
+          <a:prstGeom prst="rect">
+            <a:avLst/>
+          </a:prstGeom>
+          <a:solidFill>
+            <a:srgbClr val="D97706"/>
+          </a:solidFill>
+          <a:ln>
+            <a:noFill/>
+          </a:ln>
+        </p:spPr>
+        <p:style>
+          <a:lnRef idx="1">
+            <a:schemeClr val="accent1"/>
+          </a:lnRef>
+          <a:fillRef idx="3">
+            <a:schemeClr val="accent1"/>
+          </a:fillRef>
+          <a:effectRef idx="2">
+            <a:schemeClr val="accent1"/>
+          </a:effectRef>
+          <a:fontRef idx="minor">
+            <a:schemeClr val="lt1"/>
+          </a:fontRef>
+        </p:style>
+        <p:txBody>
+          <a:bodyPr rtlCol="0" anchor="ctr"/>
+          <a:lstStyle/>
+          <a:p>
+            <a:pPr algn="ctr"/>
+          </a:p>
+        </p:txBody>
+      </p:sp>
+      <p:sp>
+        <p:nvSpPr>
+          <p:cNvPr id="5" name="TextBox 4"/>
           <p:cNvSpPr txBox="1"/>
           <p:nvPr/>
         </p:nvSpPr>
         <p:spPr>
           <a:xfrm>
-            <a:off x="1280160" y="1097280"/>
-            <a:ext cx="10058400" cy="4663440"/>
+            <a:off x="1234440" y="1005840"/>
+            <a:ext cx="10241280" cy="4846320"/>
           </a:xfrm>
           <a:prstGeom prst="rect">
             <a:avLst/>
@@ -3200,70 +3244,165 @@
           <a:p>
             <a:pPr>
               <a:spcAft>
+                <a:spcPts val="1000"/>
+              </a:spcAft>
+              <a:defRPr b="1" sz="1300">
+                <a:solidFill>
+                  <a:srgbClr val="D97706"/>
+                </a:solidFill>
+              </a:defRPr>
+            </a:pPr>
+            <a:r>
+              <a:t>PCCST501 Computer Networks | KTU 2024 Scheme • MODULE 3 • M3.8</a:t>
+            </a:r>
+          </a:p>
+          <a:p>
+            <a:pPr>
+              <a:spcAft>
                 <a:spcPts val="1200"/>
               </a:spcAft>
-              <a:defRPr b="1" sz="1300">
-                <a:solidFill>
-                  <a:srgbClr val="D97706"/>
-                </a:solidFill>
-              </a:defRPr>
-            </a:pPr>
-            <a:r>
-              <a:t>PCCST501 Computer Networks | KTU 2024 Scheme • MODULE 3 • M3.8</a:t>
+              <a:defRPr b="1" sz="3000">
+                <a:solidFill>
+                  <a:srgbClr val="F8FAFC"/>
+                </a:solidFill>
+              </a:defRPr>
+            </a:pPr>
+            <a:r>
+              <a:t>Mobile IP Architecture &amp; Protocols</a:t>
             </a:r>
           </a:p>
           <a:p>
             <a:pPr>
               <a:spcAft>
-                <a:spcPts val="1400"/>
+                <a:spcPts val="2400"/>
               </a:spcAft>
-              <a:defRPr b="1" sz="3200">
-                <a:solidFill>
-                  <a:srgbClr val="F8FAFC"/>
-                </a:solidFill>
-              </a:defRPr>
-            </a:pPr>
-            <a:r>
-              <a:t>Mobile IP Architecture</a:t>
+              <a:defRPr sz="1600">
+                <a:solidFill>
+                  <a:srgbClr val="94A3B8"/>
+                </a:solidFill>
+              </a:defRPr>
+            </a:pPr>
+            <a:r>
+              <a:t>Mobile Node (MN), Home Agent (HA), Foreign Agent (FA), Home Address (HoA), Care-of Address (CoA), Tunneling &amp; Triangle Routing</a:t>
             </a:r>
           </a:p>
           <a:p>
             <a:pPr>
               <a:spcAft>
-                <a:spcPts val="2800"/>
+                <a:spcPts val="300"/>
               </a:spcAft>
-              <a:defRPr sz="1700">
+              <a:defRPr b="1" sz="1350">
+                <a:solidFill>
+                  <a:srgbClr val="E2E8F0"/>
+                </a:solidFill>
+              </a:defRPr>
+            </a:pPr>
+            <a:r>
+              <a:t>Prepared by: Prof. Anju Markose | Assistant Professor, Dept. of CSE | VJCET</a:t>
+            </a:r>
+          </a:p>
+          <a:p>
+            <a:pPr>
+              <a:defRPr sz="1150">
                 <a:solidFill>
                   <a:srgbClr val="94A3B8"/>
                 </a:solidFill>
               </a:defRPr>
             </a:pPr>
             <a:r>
-              <a:t>Entities (MN, HA, FA), Home Address vs Care-of Address, Agent Discovery, Triangle Routing &amp; Route Optimization</a:t>
-            </a:r>
-          </a:p>
+              <a:t>Viswajyothi College of Engineering and Technology (VJCET), Vazhakulam • KTU S5 CSE</a:t>
+            </a:r>
+          </a:p>
+        </p:txBody>
+      </p:sp>
+      <p:sp>
+        <p:nvSpPr>
+          <p:cNvPr id="6" name="Rounded Rectangle 5"/>
+          <p:cNvSpPr/>
+          <p:nvPr/>
+        </p:nvSpPr>
+        <p:spPr>
+          <a:xfrm>
+            <a:off x="8412480" y="5120640"/>
+            <a:ext cx="3017520" cy="822960"/>
+          </a:xfrm>
+          <a:prstGeom prst="roundRect">
+            <a:avLst/>
+          </a:prstGeom>
+          <a:solidFill>
+            <a:srgbClr val="1E293B"/>
+          </a:solidFill>
+          <a:ln w="12700">
+            <a:solidFill>
+              <a:srgbClr val="0E7490"/>
+            </a:solidFill>
+          </a:ln>
+        </p:spPr>
+        <p:style>
+          <a:lnRef idx="1">
+            <a:schemeClr val="accent1"/>
+          </a:lnRef>
+          <a:fillRef idx="3">
+            <a:schemeClr val="accent1"/>
+          </a:fillRef>
+          <a:effectRef idx="2">
+            <a:schemeClr val="accent1"/>
+          </a:effectRef>
+          <a:fontRef idx="minor">
+            <a:schemeClr val="lt1"/>
+          </a:fontRef>
+        </p:style>
+        <p:txBody>
+          <a:bodyPr rtlCol="0" anchor="ctr"/>
+          <a:lstStyle/>
+          <a:p>
+            <a:pPr algn="ctr"/>
+          </a:p>
+        </p:txBody>
+      </p:sp>
+      <p:sp>
+        <p:nvSpPr>
+          <p:cNvPr id="7" name="TextBox 6"/>
+          <p:cNvSpPr txBox="1"/>
+          <p:nvPr/>
+        </p:nvSpPr>
+        <p:spPr>
+          <a:xfrm>
+            <a:off x="8503920" y="5166360"/>
+            <a:ext cx="2834640" cy="731520"/>
+          </a:xfrm>
+          <a:prstGeom prst="rect">
+            <a:avLst/>
+          </a:prstGeom>
+          <a:noFill/>
+        </p:spPr>
+        <p:txBody>
+          <a:bodyPr wrap="none">
+            <a:spAutoFit/>
+          </a:bodyPr>
+          <a:lstStyle/>
           <a:p>
             <a:pPr>
-              <a:defRPr b="1" sz="1300">
-                <a:solidFill>
-                  <a:srgbClr val="E2E8F0"/>
-                </a:solidFill>
-              </a:defRPr>
-            </a:pPr>
-            <a:r>
-              <a:t>Prepared by: Prof. Anju Markose | Assistant Professor, Dept. of CSE | VJCET</a:t>
+              <a:defRPr b="1" sz="1050">
+                <a:solidFill>
+                  <a:srgbClr val="D97706"/>
+                </a:solidFill>
+              </a:defRPr>
+            </a:pPr>
+            <a:r>
+              <a:t>KTU B.Tech Curriculum</a:t>
             </a:r>
           </a:p>
           <a:p>
             <a:pPr>
-              <a:defRPr sz="1100">
-                <a:solidFill>
-                  <a:srgbClr val="94A3B8"/>
-                </a:solidFill>
-              </a:defRPr>
-            </a:pPr>
-            <a:r>
-              <a:t>Viswajyothi College of Engineering and Technology (VJCET), Vazhakulam</a:t>
+              <a:defRPr sz="950">
+                <a:solidFill>
+                  <a:srgbClr val="F8FAFC"/>
+                </a:solidFill>
+              </a:defRPr>
+            </a:pPr>
+            <a:r>
+              <a:t>Official Classroom Slide Deck</a:t>
             </a:r>
           </a:p>
         </p:txBody>
@@ -3395,14 +3534,14 @@
           <a:lstStyle/>
           <a:p>
             <a:pPr>
-              <a:defRPr b="1" sz="2300">
+              <a:defRPr b="1" sz="2200">
                 <a:solidFill>
                   <a:srgbClr val="F8FAFC"/>
                 </a:solidFill>
               </a:defRPr>
             </a:pPr>
             <a:r>
-              <a:t>3.8.1 Mobile IP Entities &amp; Addressing</a:t>
+              <a:t>3.8.1 Mobile IP Architecture &amp; Entities (RFC 5944)</a:t>
             </a:r>
           </a:p>
         </p:txBody>
@@ -3437,7 +3576,7 @@
               </a:defRPr>
             </a:pPr>
             <a:r>
-              <a:t>M3.8 MOBILE IP ENTITIES</a:t>
+              <a:t>M3.8 MOBILE IP BASICS</a:t>
             </a:r>
           </a:p>
         </p:txBody>
@@ -3450,7 +3589,7 @@
         </p:nvSpPr>
         <p:spPr>
           <a:xfrm>
-            <a:off x="731520" y="1280160"/>
+            <a:off x="731520" y="1234440"/>
             <a:ext cx="6858000" cy="4937760"/>
           </a:xfrm>
           <a:prstGeom prst="rect">
@@ -3468,29 +3607,29 @@
               <a:spcAft>
                 <a:spcPts val="200"/>
               </a:spcAft>
-              <a:defRPr b="1" sz="1500">
+              <a:defRPr b="1" sz="1450">
                 <a:solidFill>
                   <a:srgbClr val="0F1E4A"/>
                 </a:solidFill>
               </a:defRPr>
             </a:pPr>
             <a:r>
-              <a:t>• Mobile IP (RFC 5944)</a:t>
+              <a:t>• The Mobility Challenge</a:t>
             </a:r>
           </a:p>
           <a:p>
             <a:pPr>
               <a:spcAft>
-                <a:spcPts val="800"/>
+                <a:spcPts val="700"/>
               </a:spcAft>
-              <a:defRPr sz="1300">
-                <a:solidFill>
-                  <a:srgbClr val="1E293B"/>
-                </a:solidFill>
-              </a:defRPr>
-            </a:pPr>
-            <a:r>
-              <a:t>   Allows mobile devices (Mobile Nodes) to change their point of attachment to the Internet without changing their static IP address, preserving active TCP connections.</a:t>
+              <a:defRPr sz="1250">
+                <a:solidFill>
+                  <a:srgbClr val="0F172A"/>
+                </a:solidFill>
+              </a:defRPr>
+            </a:pPr>
+            <a:r>
+              <a:t>   Standard IP routing uses destination IP prefixes. If a mobile laptop moves to a new subnet, changing its IP address terminates all active TCP connections! Mobile IP allows a host to retain its permanent IP transparently.</a:t>
             </a:r>
           </a:p>
           <a:p>
@@ -3498,29 +3637,29 @@
               <a:spcAft>
                 <a:spcPts val="200"/>
               </a:spcAft>
-              <a:defRPr b="1" sz="1500">
+              <a:defRPr b="1" sz="1450">
                 <a:solidFill>
                   <a:srgbClr val="0F1E4A"/>
                 </a:solidFill>
               </a:defRPr>
             </a:pPr>
             <a:r>
-              <a:t>• Mobile Node (MN)</a:t>
+              <a:t>• Mobile IP Entities</a:t>
             </a:r>
           </a:p>
           <a:p>
             <a:pPr>
               <a:spcAft>
-                <a:spcPts val="800"/>
+                <a:spcPts val="700"/>
               </a:spcAft>
-              <a:defRPr sz="1300">
-                <a:solidFill>
-                  <a:srgbClr val="1E293B"/>
-                </a:solidFill>
-              </a:defRPr>
-            </a:pPr>
-            <a:r>
-              <a:t>   End system that moves across subnets (e.g. smartphone moving between Wi-Fi and 5G).</a:t>
+              <a:defRPr sz="1250">
+                <a:solidFill>
+                  <a:srgbClr val="0F172A"/>
+                </a:solidFill>
+              </a:defRPr>
+            </a:pPr>
+            <a:r>
+              <a:t>   1. **Mobile Node (MN)**: The roaming host. \n 2. **Home Network &amp; Home Agent (HA)**: The home subnet and the router acting on behalf of MN when away. \n 3. **Foreign Network &amp; Foreign Agent (FA)**: The visited subnet router assisting MN. \n 4. **Correspondent Node (CN)**: The peer host communicating with MN.</a:t>
             </a:r>
           </a:p>
           <a:p>
@@ -3528,89 +3667,29 @@
               <a:spcAft>
                 <a:spcPts val="200"/>
               </a:spcAft>
-              <a:defRPr b="1" sz="1500">
+              <a:defRPr b="1" sz="1450">
                 <a:solidFill>
                   <a:srgbClr val="0F1E4A"/>
                 </a:solidFill>
               </a:defRPr>
             </a:pPr>
             <a:r>
-              <a:t>• Home Agent (HA)</a:t>
+              <a:t>• Dual-Address Mechanism</a:t>
             </a:r>
           </a:p>
           <a:p>
             <a:pPr>
               <a:spcAft>
-                <a:spcPts val="800"/>
+                <a:spcPts val="700"/>
               </a:spcAft>
-              <a:defRPr sz="1300">
-                <a:solidFill>
-                  <a:srgbClr val="1E293B"/>
-                </a:solidFill>
-              </a:defRPr>
-            </a:pPr>
-            <a:r>
-              <a:t>   Router on the Mobile Node's home network that tunnels packets to the MN when it is away from home.</a:t>
-            </a:r>
-          </a:p>
-          <a:p>
-            <a:pPr>
-              <a:spcAft>
-                <a:spcPts val="200"/>
-              </a:spcAft>
-              <a:defRPr b="1" sz="1500">
-                <a:solidFill>
-                  <a:srgbClr val="0F1E4A"/>
-                </a:solidFill>
-              </a:defRPr>
-            </a:pPr>
-            <a:r>
-              <a:t>• Foreign Agent (FA)</a:t>
-            </a:r>
-          </a:p>
-          <a:p>
-            <a:pPr>
-              <a:spcAft>
-                <a:spcPts val="800"/>
-              </a:spcAft>
-              <a:defRPr sz="1300">
-                <a:solidFill>
-                  <a:srgbClr val="1E293B"/>
-                </a:solidFill>
-              </a:defRPr>
-            </a:pPr>
-            <a:r>
-              <a:t>   Router on the visited foreign network that assists the MN in receiving packets and provides a Care-of Address (COA).</a:t>
-            </a:r>
-          </a:p>
-          <a:p>
-            <a:pPr>
-              <a:spcAft>
-                <a:spcPts val="200"/>
-              </a:spcAft>
-              <a:defRPr b="1" sz="1500">
-                <a:solidFill>
-                  <a:srgbClr val="0F1E4A"/>
-                </a:solidFill>
-              </a:defRPr>
-            </a:pPr>
-            <a:r>
-              <a:t>• Two IP Addresses</a:t>
-            </a:r>
-          </a:p>
-          <a:p>
-            <a:pPr>
-              <a:spcAft>
-                <a:spcPts val="800"/>
-              </a:spcAft>
-              <a:defRPr sz="1300">
-                <a:solidFill>
-                  <a:srgbClr val="1E293B"/>
-                </a:solidFill>
-              </a:defRPr>
-            </a:pPr>
-            <a:r>
-              <a:t>   Permanent Home Address (static IP identifying MN) and Temporary Care-of Address (COA identifying current location).</a:t>
+              <a:defRPr sz="1250">
+                <a:solidFill>
+                  <a:srgbClr val="0F172A"/>
+                </a:solidFill>
+              </a:defRPr>
+            </a:pPr>
+            <a:r>
+              <a:t>   1. **Home Address (HoA)**: Permanent IP address assigned in home subnet (used for active TCP sessions). \n 2. **Care-of Address (CoA)**: Temporary IP address associated with visited foreign network.</a:t>
             </a:r>
           </a:p>
         </p:txBody>
@@ -3623,14 +3702,14 @@
         </p:nvSpPr>
         <p:spPr>
           <a:xfrm>
-            <a:off x="7955279" y="1280160"/>
-            <a:ext cx="3566160" cy="4846320"/>
+            <a:off x="7955279" y="1234440"/>
+            <a:ext cx="3566160" cy="4892040"/>
           </a:xfrm>
           <a:prstGeom prst="roundRect">
             <a:avLst/>
           </a:prstGeom>
           <a:solidFill>
-            <a:srgbClr val="F1F5F9"/>
+            <a:srgbClr val="F8FAFC"/>
           </a:solidFill>
           <a:ln w="19050">
             <a:solidFill>
@@ -3668,7 +3747,7 @@
         </p:nvSpPr>
         <p:spPr>
           <a:xfrm>
-            <a:off x="8138160" y="1417320"/>
+            <a:off x="8138160" y="1371600"/>
             <a:ext cx="3200400" cy="4572000"/>
           </a:xfrm>
           <a:prstGeom prst="rect">
@@ -3693,7 +3772,7 @@
               </a:defRPr>
             </a:pPr>
             <a:r>
-              <a:t>Mobile IP Terminology</a:t>
+              <a:t>Core Entities</a:t>
             </a:r>
           </a:p>
           <a:p>
@@ -3703,7 +3782,7 @@
               </a:spcAft>
               <a:defRPr sz="1200">
                 <a:solidFill>
-                  <a:srgbClr val="1E293B"/>
+                  <a:srgbClr val="0F172A"/>
                 </a:solidFill>
               </a:defRPr>
             </a:pPr>
@@ -3718,7 +3797,7 @@
               </a:spcAft>
               <a:defRPr sz="1200">
                 <a:solidFill>
-                  <a:srgbClr val="1E293B"/>
+                  <a:srgbClr val="0F172A"/>
                 </a:solidFill>
               </a:defRPr>
             </a:pPr>
@@ -3733,7 +3812,7 @@
               </a:spcAft>
               <a:defRPr sz="1200">
                 <a:solidFill>
-                  <a:srgbClr val="1E293B"/>
+                  <a:srgbClr val="0F172A"/>
                 </a:solidFill>
               </a:defRPr>
             </a:pPr>
@@ -3748,12 +3827,12 @@
               </a:spcAft>
               <a:defRPr sz="1200">
                 <a:solidFill>
-                  <a:srgbClr val="1E293B"/>
-                </a:solidFill>
-              </a:defRPr>
-            </a:pPr>
-            <a:r>
-              <a:t>→ Home Address: Permanent static IP</a:t>
+                  <a:srgbClr val="0F172A"/>
+                </a:solidFill>
+              </a:defRPr>
+            </a:pPr>
+            <a:r>
+              <a:t>→ HoA: Permanent IP address</a:t>
             </a:r>
           </a:p>
           <a:p>
@@ -3763,12 +3842,27 @@
               </a:spcAft>
               <a:defRPr sz="1200">
                 <a:solidFill>
-                  <a:srgbClr val="1E293B"/>
-                </a:solidFill>
-              </a:defRPr>
-            </a:pPr>
-            <a:r>
-              <a:t>→ COA: Temporary location address</a:t>
+                  <a:srgbClr val="0F172A"/>
+                </a:solidFill>
+              </a:defRPr>
+            </a:pPr>
+            <a:r>
+              <a:t>→ CoA: Temporary visited IP</a:t>
+            </a:r>
+          </a:p>
+          <a:p>
+            <a:pPr>
+              <a:spcAft>
+                <a:spcPts val="600"/>
+              </a:spcAft>
+              <a:defRPr sz="1200">
+                <a:solidFill>
+                  <a:srgbClr val="0F172A"/>
+                </a:solidFill>
+              </a:defRPr>
+            </a:pPr>
+            <a:r>
+              <a:t>→ CN: Correspondent Node</a:t>
             </a:r>
           </a:p>
         </p:txBody>
@@ -3781,8 +3875,8 @@
         </p:nvSpPr>
         <p:spPr>
           <a:xfrm>
-            <a:off x="731520" y="6309360"/>
-            <a:ext cx="10789920" cy="365760"/>
+            <a:off x="731520" y="6327648"/>
+            <a:ext cx="10789920" cy="320040"/>
           </a:xfrm>
           <a:prstGeom prst="rect">
             <a:avLst/>
@@ -3804,6 +3898,41 @@
             </a:pPr>
             <a:r>
               <a:t>PCCST501 Computer Networks | KTU 2024 Scheme | Prof. Anju Markose | Assistant Professor, Dept. of CSE | VJCET</a:t>
+            </a:r>
+          </a:p>
+        </p:txBody>
+      </p:sp>
+      <p:sp>
+        <p:nvSpPr>
+          <p:cNvPr id="10" name="TextBox 9"/>
+          <p:cNvSpPr txBox="1"/>
+          <p:nvPr/>
+        </p:nvSpPr>
+        <p:spPr>
+          <a:xfrm>
+            <a:off x="6858000" y="6327648"/>
+            <a:ext cx="4572000" cy="320040"/>
+          </a:xfrm>
+          <a:prstGeom prst="rect">
+            <a:avLst/>
+          </a:prstGeom>
+          <a:noFill/>
+        </p:spPr>
+        <p:txBody>
+          <a:bodyPr wrap="none">
+            <a:spAutoFit/>
+          </a:bodyPr>
+          <a:lstStyle/>
+          <a:p>
+            <a:pPr algn="r">
+              <a:defRPr sz="950">
+                <a:solidFill>
+                  <a:srgbClr val="64748B"/>
+                </a:solidFill>
+              </a:defRPr>
+            </a:pPr>
+            <a:r>
+              <a:t>Dept. of CSE, VJCET</a:t>
             </a:r>
           </a:p>
         </p:txBody>
@@ -3935,14 +4064,14 @@
           <a:lstStyle/>
           <a:p>
             <a:pPr>
-              <a:defRPr b="1" sz="2300">
+              <a:defRPr b="1" sz="2200">
                 <a:solidFill>
                   <a:srgbClr val="F8FAFC"/>
                 </a:solidFill>
               </a:defRPr>
             </a:pPr>
             <a:r>
-              <a:t>3.8.2 Triangle Routing &amp; Encapsulation Tunneling</a:t>
+              <a:t>3.8.2 Operational Phases: Registration, Tunneling &amp; Triangle Routing</a:t>
             </a:r>
           </a:p>
         </p:txBody>
@@ -3977,7 +4106,7 @@
               </a:defRPr>
             </a:pPr>
             <a:r>
-              <a:t>M3.8 TRIANGLE ROUTING</a:t>
+              <a:t>M3.8 MOBILE IP PHASES</a:t>
             </a:r>
           </a:p>
         </p:txBody>
@@ -3990,7 +4119,7 @@
         </p:nvSpPr>
         <p:spPr>
           <a:xfrm>
-            <a:off x="731520" y="1280160"/>
+            <a:off x="731520" y="1234440"/>
             <a:ext cx="6858000" cy="4937760"/>
           </a:xfrm>
           <a:prstGeom prst="rect">
@@ -4008,29 +4137,29 @@
               <a:spcAft>
                 <a:spcPts val="200"/>
               </a:spcAft>
-              <a:defRPr b="1" sz="1500">
+              <a:defRPr b="1" sz="1450">
                 <a:solidFill>
                   <a:srgbClr val="0F1E4A"/>
                 </a:solidFill>
               </a:defRPr>
             </a:pPr>
             <a:r>
-              <a:t>• Agent Discovery &amp; Registration</a:t>
+              <a:t>• Phase 1: Agent Discovery</a:t>
             </a:r>
           </a:p>
           <a:p>
             <a:pPr>
               <a:spcAft>
-                <a:spcPts val="800"/>
+                <a:spcPts val="700"/>
               </a:spcAft>
-              <a:defRPr sz="1300">
-                <a:solidFill>
-                  <a:srgbClr val="1E293B"/>
-                </a:solidFill>
-              </a:defRPr>
-            </a:pPr>
-            <a:r>
-              <a:t>   Foreign Agents broadcast periodic Agent Advertisements. MN registers its new COA with Home Agent via Registration Request.</a:t>
+              <a:defRPr sz="1250">
+                <a:solidFill>
+                  <a:srgbClr val="0F172A"/>
+                </a:solidFill>
+              </a:defRPr>
+            </a:pPr>
+            <a:r>
+              <a:t>   Foreign Agents broadcast periodic Agent Advertisements (ICMP extension); MN detects it has moved and obtains a CoA.</a:t>
             </a:r>
           </a:p>
           <a:p>
@@ -4038,29 +4167,29 @@
               <a:spcAft>
                 <a:spcPts val="200"/>
               </a:spcAft>
-              <a:defRPr b="1" sz="1500">
+              <a:defRPr b="1" sz="1450">
                 <a:solidFill>
                   <a:srgbClr val="0F1E4A"/>
                 </a:solidFill>
               </a:defRPr>
             </a:pPr>
             <a:r>
-              <a:t>• Triangle Routing Mechanism</a:t>
+              <a:t>• Phase 2: Registration</a:t>
             </a:r>
           </a:p>
           <a:p>
             <a:pPr>
               <a:spcAft>
-                <a:spcPts val="800"/>
+                <a:spcPts val="700"/>
               </a:spcAft>
-              <a:defRPr sz="1300">
-                <a:solidFill>
-                  <a:srgbClr val="1E293B"/>
-                </a:solidFill>
-              </a:defRPr>
-            </a:pPr>
-            <a:r>
-              <a:t>   1. Correspondent Node (CN) sends packet to MN's Home Address. 2. Home Agent intercepts packet. 3. HA encapsulates packet inside a new IP header (`Dst = COA`) [IP-in-IP Tunneling]. 4. FA decapsulates packet and delivers to MN. 5. MN replies directly to CN.</a:t>
+              <a:defRPr sz="1250">
+                <a:solidFill>
+                  <a:srgbClr val="0F172A"/>
+                </a:solidFill>
+              </a:defRPr>
+            </a:pPr>
+            <a:r>
+              <a:t>   MN sends Registration Request to FA -&gt; FA forwards to Home Agent (HA) -&gt; HA updates binding table (`HoA -&gt; CoA`) and sends Registration Reply.</a:t>
             </a:r>
           </a:p>
           <a:p>
@@ -4068,29 +4197,29 @@
               <a:spcAft>
                 <a:spcPts val="200"/>
               </a:spcAft>
-              <a:defRPr b="1" sz="1500">
+              <a:defRPr b="1" sz="1450">
                 <a:solidFill>
                   <a:srgbClr val="0F1E4A"/>
                 </a:solidFill>
               </a:defRPr>
             </a:pPr>
             <a:r>
-              <a:t>• Inefficiency of Triangle Routing</a:t>
+              <a:t>• Phase 3: Data Transfer (IP-in-IP Encapsulation Tunneling)</a:t>
             </a:r>
           </a:p>
           <a:p>
             <a:pPr>
               <a:spcAft>
-                <a:spcPts val="800"/>
+                <a:spcPts val="700"/>
               </a:spcAft>
-              <a:defRPr sz="1300">
-                <a:solidFill>
-                  <a:srgbClr val="1E293B"/>
-                </a:solidFill>
-              </a:defRPr>
-            </a:pPr>
-            <a:r>
-              <a:t>   Packets travel an indirect triangular path through the Home Agent even if CN and MN are on adjacent networks, adding propagation delay.</a:t>
+              <a:defRPr sz="1250">
+                <a:solidFill>
+                  <a:srgbClr val="0F172A"/>
+                </a:solidFill>
+              </a:defRPr>
+            </a:pPr>
+            <a:r>
+              <a:t>   CN sends packet to `HoA` -&gt; Routed to Home Network -&gt; Home Agent intercepts packet via Proxy ARP -&gt; HA encapsulates packet inside a new IP header (`Src IP = HA`, `Dst IP = CoA`) -&gt; Transmits through IP tunnel to FA -&gt; FA decapsulates and delivers to MN.</a:t>
             </a:r>
           </a:p>
           <a:p>
@@ -4098,29 +4227,29 @@
               <a:spcAft>
                 <a:spcPts val="200"/>
               </a:spcAft>
-              <a:defRPr b="1" sz="1500">
+              <a:defRPr b="1" sz="1450">
                 <a:solidFill>
                   <a:srgbClr val="0F1E4A"/>
                 </a:solidFill>
               </a:defRPr>
             </a:pPr>
             <a:r>
-              <a:t>• Route Optimization Solution</a:t>
+              <a:t>• Reverse Path &amp; Triangle Routing Problem</a:t>
             </a:r>
           </a:p>
           <a:p>
             <a:pPr>
               <a:spcAft>
-                <a:spcPts val="800"/>
+                <a:spcPts val="700"/>
               </a:spcAft>
-              <a:defRPr sz="1300">
-                <a:solidFill>
-                  <a:srgbClr val="1E293B"/>
-                </a:solidFill>
-              </a:defRPr>
-            </a:pPr>
-            <a:r>
-              <a:t>   HA sends a Binding Update to CN containing MN's current COA, allowing CN to tunnel future packets directly to MN's COA.</a:t>
+              <a:defRPr sz="1250">
+                <a:solidFill>
+                  <a:srgbClr val="0F172A"/>
+                </a:solidFill>
+              </a:defRPr>
+            </a:pPr>
+            <a:r>
+              <a:t>   MN sends directly to CN via standard IP routing. However, traffic from CN travels through HA -&gt; FA -&gt; MN (inefficient Triangle Routing). Solution: Route Optimization allows CN to cache MN's CoA and tunnel directly.</a:t>
             </a:r>
           </a:p>
         </p:txBody>
@@ -4133,14 +4262,14 @@
         </p:nvSpPr>
         <p:spPr>
           <a:xfrm>
-            <a:off x="7955279" y="1280160"/>
-            <a:ext cx="3566160" cy="4846320"/>
+            <a:off x="7955279" y="1234440"/>
+            <a:ext cx="3566160" cy="4892040"/>
           </a:xfrm>
           <a:prstGeom prst="roundRect">
             <a:avLst/>
           </a:prstGeom>
           <a:solidFill>
-            <a:srgbClr val="F1F5F9"/>
+            <a:srgbClr val="F8FAFC"/>
           </a:solidFill>
           <a:ln w="19050">
             <a:solidFill>
@@ -4178,7 +4307,7 @@
         </p:nvSpPr>
         <p:spPr>
           <a:xfrm>
-            <a:off x="8138160" y="1417320"/>
+            <a:off x="8138160" y="1371600"/>
             <a:ext cx="3200400" cy="4572000"/>
           </a:xfrm>
           <a:prstGeom prst="rect">
@@ -4203,7 +4332,7 @@
               </a:defRPr>
             </a:pPr>
             <a:r>
-              <a:t>Key Takeaways</a:t>
+              <a:t>Tunneling Flow</a:t>
             </a:r>
           </a:p>
           <a:p>
@@ -4213,12 +4342,12 @@
               </a:spcAft>
               <a:defRPr sz="1200">
                 <a:solidFill>
-                  <a:srgbClr val="1E293B"/>
-                </a:solidFill>
-              </a:defRPr>
-            </a:pPr>
-            <a:r>
-              <a:t>→ IP-in-IP Encapsulation Tunneling</a:t>
+                  <a:srgbClr val="0F172A"/>
+                </a:solidFill>
+              </a:defRPr>
+            </a:pPr>
+            <a:r>
+              <a:t>→ CN -&gt; Home Agent (HoA)</a:t>
             </a:r>
           </a:p>
           <a:p>
@@ -4228,12 +4357,12 @@
               </a:spcAft>
               <a:defRPr sz="1200">
                 <a:solidFill>
-                  <a:srgbClr val="1E293B"/>
-                </a:solidFill>
-              </a:defRPr>
-            </a:pPr>
-            <a:r>
-              <a:t>→ Triangle Path: CN -&gt; HA -&gt; FA -&gt; MN</a:t>
+                  <a:srgbClr val="0F172A"/>
+                </a:solidFill>
+              </a:defRPr>
+            </a:pPr>
+            <a:r>
+              <a:t>→ HA intercepts (Proxy ARP)</a:t>
             </a:r>
           </a:p>
           <a:p>
@@ -4243,12 +4372,12 @@
               </a:spcAft>
               <a:defRPr sz="1200">
                 <a:solidFill>
-                  <a:srgbClr val="1E293B"/>
-                </a:solidFill>
-              </a:defRPr>
-            </a:pPr>
-            <a:r>
-              <a:t>→ Direct Reply: MN -&gt; CN</a:t>
+                  <a:srgbClr val="0F172A"/>
+                </a:solidFill>
+              </a:defRPr>
+            </a:pPr>
+            <a:r>
+              <a:t>→ HA tunnels to FA (IP-in-IP)</a:t>
             </a:r>
           </a:p>
           <a:p>
@@ -4258,12 +4387,42 @@
               </a:spcAft>
               <a:defRPr sz="1200">
                 <a:solidFill>
-                  <a:srgbClr val="1E293B"/>
-                </a:solidFill>
-              </a:defRPr>
-            </a:pPr>
-            <a:r>
-              <a:t>→ Binding Update: Eliminates triangle</a:t>
+                  <a:srgbClr val="0F172A"/>
+                </a:solidFill>
+              </a:defRPr>
+            </a:pPr>
+            <a:r>
+              <a:t>→ FA decapsulates -&gt; MN</a:t>
+            </a:r>
+          </a:p>
+          <a:p>
+            <a:pPr>
+              <a:spcAft>
+                <a:spcPts val="600"/>
+              </a:spcAft>
+              <a:defRPr sz="1200">
+                <a:solidFill>
+                  <a:srgbClr val="0F172A"/>
+                </a:solidFill>
+              </a:defRPr>
+            </a:pPr>
+            <a:r>
+              <a:t>→ MN replies directly to CN</a:t>
+            </a:r>
+          </a:p>
+          <a:p>
+            <a:pPr>
+              <a:spcAft>
+                <a:spcPts val="600"/>
+              </a:spcAft>
+              <a:defRPr sz="1200">
+                <a:solidFill>
+                  <a:srgbClr val="0F172A"/>
+                </a:solidFill>
+              </a:defRPr>
+            </a:pPr>
+            <a:r>
+              <a:t>→ Triangle Routing fixed via CoA cache</a:t>
             </a:r>
           </a:p>
         </p:txBody>
@@ -4276,8 +4435,8 @@
         </p:nvSpPr>
         <p:spPr>
           <a:xfrm>
-            <a:off x="731520" y="6309360"/>
-            <a:ext cx="10789920" cy="365760"/>
+            <a:off x="731520" y="6327648"/>
+            <a:ext cx="10789920" cy="320040"/>
           </a:xfrm>
           <a:prstGeom prst="rect">
             <a:avLst/>
@@ -4299,6 +4458,541 @@
             </a:pPr>
             <a:r>
               <a:t>PCCST501 Computer Networks | KTU 2024 Scheme | Prof. Anju Markose | Assistant Professor, Dept. of CSE | VJCET</a:t>
+            </a:r>
+          </a:p>
+        </p:txBody>
+      </p:sp>
+      <p:sp>
+        <p:nvSpPr>
+          <p:cNvPr id="10" name="TextBox 9"/>
+          <p:cNvSpPr txBox="1"/>
+          <p:nvPr/>
+        </p:nvSpPr>
+        <p:spPr>
+          <a:xfrm>
+            <a:off x="6858000" y="6327648"/>
+            <a:ext cx="4572000" cy="320040"/>
+          </a:xfrm>
+          <a:prstGeom prst="rect">
+            <a:avLst/>
+          </a:prstGeom>
+          <a:noFill/>
+        </p:spPr>
+        <p:txBody>
+          <a:bodyPr wrap="none">
+            <a:spAutoFit/>
+          </a:bodyPr>
+          <a:lstStyle/>
+          <a:p>
+            <a:pPr algn="r">
+              <a:defRPr sz="950">
+                <a:solidFill>
+                  <a:srgbClr val="64748B"/>
+                </a:solidFill>
+              </a:defRPr>
+            </a:pPr>
+            <a:r>
+              <a:t>Dept. of CSE, VJCET</a:t>
+            </a:r>
+          </a:p>
+        </p:txBody>
+      </p:sp>
+    </p:spTree>
+  </p:cSld>
+  <p:clrMapOvr>
+    <a:masterClrMapping/>
+  </p:clrMapOvr>
+</p:sld>
+</file>
+
+<file path=ppt/slides/slide4.xml><?xml version="1.0" encoding="utf-8"?>
+<p:sld xmlns:a="http://schemas.openxmlformats.org/drawingml/2006/main" xmlns:p="http://schemas.openxmlformats.org/presentationml/2006/main" xmlns:r="http://schemas.openxmlformats.org/officeDocument/2006/relationships">
+  <p:cSld>
+    <p:spTree>
+      <p:nvGrpSpPr>
+        <p:cNvPr id="1" name=""/>
+        <p:cNvGrpSpPr/>
+        <p:nvPr/>
+      </p:nvGrpSpPr>
+      <p:grpSpPr/>
+      <p:sp>
+        <p:nvSpPr>
+          <p:cNvPr id="2" name="Rectangle 1"/>
+          <p:cNvSpPr/>
+          <p:nvPr/>
+        </p:nvSpPr>
+        <p:spPr>
+          <a:xfrm>
+            <a:off x="0" y="0"/>
+            <a:ext cx="12191695" cy="1005840"/>
+          </a:xfrm>
+          <a:prstGeom prst="rect">
+            <a:avLst/>
+          </a:prstGeom>
+          <a:solidFill>
+            <a:srgbClr val="0F1E4A"/>
+          </a:solidFill>
+          <a:ln>
+            <a:noFill/>
+          </a:ln>
+        </p:spPr>
+        <p:style>
+          <a:lnRef idx="1">
+            <a:schemeClr val="accent1"/>
+          </a:lnRef>
+          <a:fillRef idx="3">
+            <a:schemeClr val="accent1"/>
+          </a:fillRef>
+          <a:effectRef idx="2">
+            <a:schemeClr val="accent1"/>
+          </a:effectRef>
+          <a:fontRef idx="minor">
+            <a:schemeClr val="lt1"/>
+          </a:fontRef>
+        </p:style>
+        <p:txBody>
+          <a:bodyPr rtlCol="0" anchor="ctr"/>
+          <a:lstStyle/>
+          <a:p>
+            <a:pPr algn="ctr"/>
+          </a:p>
+        </p:txBody>
+      </p:sp>
+      <p:sp>
+        <p:nvSpPr>
+          <p:cNvPr id="3" name="Rectangle 2"/>
+          <p:cNvSpPr/>
+          <p:nvPr/>
+        </p:nvSpPr>
+        <p:spPr>
+          <a:xfrm>
+            <a:off x="0" y="969264"/>
+            <a:ext cx="12191695" cy="36576"/>
+          </a:xfrm>
+          <a:prstGeom prst="rect">
+            <a:avLst/>
+          </a:prstGeom>
+          <a:solidFill>
+            <a:srgbClr val="D97706"/>
+          </a:solidFill>
+          <a:ln>
+            <a:noFill/>
+          </a:ln>
+        </p:spPr>
+        <p:style>
+          <a:lnRef idx="1">
+            <a:schemeClr val="accent1"/>
+          </a:lnRef>
+          <a:fillRef idx="3">
+            <a:schemeClr val="accent1"/>
+          </a:fillRef>
+          <a:effectRef idx="2">
+            <a:schemeClr val="accent1"/>
+          </a:effectRef>
+          <a:fontRef idx="minor">
+            <a:schemeClr val="lt1"/>
+          </a:fontRef>
+        </p:style>
+        <p:txBody>
+          <a:bodyPr rtlCol="0" anchor="ctr"/>
+          <a:lstStyle/>
+          <a:p>
+            <a:pPr algn="ctr"/>
+          </a:p>
+        </p:txBody>
+      </p:sp>
+      <p:sp>
+        <p:nvSpPr>
+          <p:cNvPr id="4" name="TextBox 3"/>
+          <p:cNvSpPr txBox="1"/>
+          <p:nvPr/>
+        </p:nvSpPr>
+        <p:spPr>
+          <a:xfrm>
+            <a:off x="731520" y="164592"/>
+            <a:ext cx="8412480" cy="685800"/>
+          </a:xfrm>
+          <a:prstGeom prst="rect">
+            <a:avLst/>
+          </a:prstGeom>
+          <a:noFill/>
+        </p:spPr>
+        <p:txBody>
+          <a:bodyPr wrap="none">
+            <a:spAutoFit/>
+          </a:bodyPr>
+          <a:lstStyle/>
+          <a:p>
+            <a:pPr>
+              <a:defRPr b="1" sz="2100">
+                <a:solidFill>
+                  <a:srgbClr val="F8FAFC"/>
+                </a:solidFill>
+              </a:defRPr>
+            </a:pPr>
+            <a:r>
+              <a:t>🎯 Exam Booster &amp; Review: Mobile IP Architecture</a:t>
+            </a:r>
+          </a:p>
+        </p:txBody>
+      </p:sp>
+      <p:sp>
+        <p:nvSpPr>
+          <p:cNvPr id="5" name="TextBox 4"/>
+          <p:cNvSpPr txBox="1"/>
+          <p:nvPr/>
+        </p:nvSpPr>
+        <p:spPr>
+          <a:xfrm>
+            <a:off x="8229600" y="164592"/>
+            <a:ext cx="3291840" cy="685800"/>
+          </a:xfrm>
+          <a:prstGeom prst="rect">
+            <a:avLst/>
+          </a:prstGeom>
+          <a:noFill/>
+        </p:spPr>
+        <p:txBody>
+          <a:bodyPr wrap="none">
+            <a:spAutoFit/>
+          </a:bodyPr>
+          <a:lstStyle/>
+          <a:p>
+            <a:pPr algn="r">
+              <a:defRPr b="1" sz="1300">
+                <a:solidFill>
+                  <a:srgbClr val="D97706"/>
+                </a:solidFill>
+              </a:defRPr>
+            </a:pPr>
+            <a:r>
+              <a:t>M3.8</a:t>
+            </a:r>
+          </a:p>
+        </p:txBody>
+      </p:sp>
+      <p:sp>
+        <p:nvSpPr>
+          <p:cNvPr id="6" name="Rounded Rectangle 5"/>
+          <p:cNvSpPr/>
+          <p:nvPr/>
+        </p:nvSpPr>
+        <p:spPr>
+          <a:xfrm>
+            <a:off x="731520" y="1234440"/>
+            <a:ext cx="5303520" cy="4892040"/>
+          </a:xfrm>
+          <a:prstGeom prst="roundRect">
+            <a:avLst/>
+          </a:prstGeom>
+          <a:solidFill>
+            <a:srgbClr val="FEF3C7"/>
+          </a:solidFill>
+          <a:ln w="19050">
+            <a:solidFill>
+              <a:srgbClr val="D97706"/>
+            </a:solidFill>
+          </a:ln>
+        </p:spPr>
+        <p:style>
+          <a:lnRef idx="1">
+            <a:schemeClr val="accent1"/>
+          </a:lnRef>
+          <a:fillRef idx="3">
+            <a:schemeClr val="accent1"/>
+          </a:fillRef>
+          <a:effectRef idx="2">
+            <a:schemeClr val="accent1"/>
+          </a:effectRef>
+          <a:fontRef idx="minor">
+            <a:schemeClr val="lt1"/>
+          </a:fontRef>
+        </p:style>
+        <p:txBody>
+          <a:bodyPr rtlCol="0" anchor="ctr"/>
+          <a:lstStyle/>
+          <a:p>
+            <a:pPr algn="ctr"/>
+          </a:p>
+        </p:txBody>
+      </p:sp>
+      <p:sp>
+        <p:nvSpPr>
+          <p:cNvPr id="7" name="TextBox 6"/>
+          <p:cNvSpPr txBox="1"/>
+          <p:nvPr/>
+        </p:nvSpPr>
+        <p:spPr>
+          <a:xfrm>
+            <a:off x="914400" y="1371600"/>
+            <a:ext cx="4937760" cy="4572000"/>
+          </a:xfrm>
+          <a:prstGeom prst="rect">
+            <a:avLst/>
+          </a:prstGeom>
+          <a:noFill/>
+        </p:spPr>
+        <p:txBody>
+          <a:bodyPr wrap="square">
+            <a:spAutoFit/>
+          </a:bodyPr>
+          <a:lstStyle/>
+          <a:p>
+            <a:pPr>
+              <a:spcAft>
+                <a:spcPts val="1000"/>
+              </a:spcAft>
+              <a:defRPr b="1" sz="1450">
+                <a:solidFill>
+                  <a:srgbClr val="D97706"/>
+                </a:solidFill>
+              </a:defRPr>
+            </a:pPr>
+            <a:r>
+              <a:t>📚 KTU High-Yield Questions (K2 Understand)</a:t>
+            </a:r>
+          </a:p>
+          <a:p>
+            <a:pPr>
+              <a:spcAft>
+                <a:spcPts val="700"/>
+              </a:spcAft>
+              <a:defRPr sz="1200">
+                <a:solidFill>
+                  <a:srgbClr val="0F172A"/>
+                </a:solidFill>
+              </a:defRPr>
+            </a:pPr>
+            <a:r>
+              <a:t>Q: Explain the architecture and entities of Mobile IP (MN, HA, FA, HoA, CoA) with a neat diagram. (8 Marks)</a:t>
+            </a:r>
+          </a:p>
+          <a:p>
+            <a:pPr>
+              <a:spcAft>
+                <a:spcPts val="700"/>
+              </a:spcAft>
+              <a:defRPr sz="1200">
+                <a:solidFill>
+                  <a:srgbClr val="0F172A"/>
+                </a:solidFill>
+              </a:defRPr>
+            </a:pPr>
+            <a:r>
+              <a:t>Q: Explain the three operational phases of Mobile IP: Agent Discovery, Registration, and Encapsulation Tunneling. (8 Marks)</a:t>
+            </a:r>
+          </a:p>
+          <a:p>
+            <a:pPr>
+              <a:spcAft>
+                <a:spcPts val="700"/>
+              </a:spcAft>
+              <a:defRPr sz="1200">
+                <a:solidFill>
+                  <a:srgbClr val="0F172A"/>
+                </a:solidFill>
+              </a:defRPr>
+            </a:pPr>
+            <a:r>
+              <a:t>Q: What is the Triangle Routing problem in Mobile IP, and how does Route Optimization solve it? (6 Marks)</a:t>
+            </a:r>
+          </a:p>
+        </p:txBody>
+      </p:sp>
+      <p:sp>
+        <p:nvSpPr>
+          <p:cNvPr id="8" name="Rounded Rectangle 7"/>
+          <p:cNvSpPr/>
+          <p:nvPr/>
+        </p:nvSpPr>
+        <p:spPr>
+          <a:xfrm>
+            <a:off x="6309360" y="1234440"/>
+            <a:ext cx="5212080" cy="4892040"/>
+          </a:xfrm>
+          <a:prstGeom prst="roundRect">
+            <a:avLst/>
+          </a:prstGeom>
+          <a:solidFill>
+            <a:srgbClr val="EEF2FF"/>
+          </a:solidFill>
+          <a:ln w="19050">
+            <a:solidFill>
+              <a:srgbClr val="0E7490"/>
+            </a:solidFill>
+          </a:ln>
+        </p:spPr>
+        <p:style>
+          <a:lnRef idx="1">
+            <a:schemeClr val="accent1"/>
+          </a:lnRef>
+          <a:fillRef idx="3">
+            <a:schemeClr val="accent1"/>
+          </a:fillRef>
+          <a:effectRef idx="2">
+            <a:schemeClr val="accent1"/>
+          </a:effectRef>
+          <a:fontRef idx="minor">
+            <a:schemeClr val="lt1"/>
+          </a:fontRef>
+        </p:style>
+        <p:txBody>
+          <a:bodyPr rtlCol="0" anchor="ctr"/>
+          <a:lstStyle/>
+          <a:p>
+            <a:pPr algn="ctr"/>
+          </a:p>
+        </p:txBody>
+      </p:sp>
+      <p:sp>
+        <p:nvSpPr>
+          <p:cNvPr id="9" name="TextBox 8"/>
+          <p:cNvSpPr txBox="1"/>
+          <p:nvPr/>
+        </p:nvSpPr>
+        <p:spPr>
+          <a:xfrm>
+            <a:off x="6492240" y="1371600"/>
+            <a:ext cx="4846320" cy="4572000"/>
+          </a:xfrm>
+          <a:prstGeom prst="rect">
+            <a:avLst/>
+          </a:prstGeom>
+          <a:noFill/>
+        </p:spPr>
+        <p:txBody>
+          <a:bodyPr wrap="square">
+            <a:spAutoFit/>
+          </a:bodyPr>
+          <a:lstStyle/>
+          <a:p>
+            <a:pPr>
+              <a:spcAft>
+                <a:spcPts val="1000"/>
+              </a:spcAft>
+              <a:defRPr b="1" sz="1450">
+                <a:solidFill>
+                  <a:srgbClr val="0E7490"/>
+                </a:solidFill>
+              </a:defRPr>
+            </a:pPr>
+            <a:r>
+              <a:t>💡 Critical Conceptual Takeaways</a:t>
+            </a:r>
+          </a:p>
+          <a:p>
+            <a:pPr>
+              <a:spcAft>
+                <a:spcPts val="600"/>
+              </a:spcAft>
+              <a:defRPr sz="1200">
+                <a:solidFill>
+                  <a:srgbClr val="0F172A"/>
+                </a:solidFill>
+              </a:defRPr>
+            </a:pPr>
+            <a:r>
+              <a:t>✔ Mobile IP preserves TCP connection survivability during subnet roaming.</a:t>
+            </a:r>
+          </a:p>
+          <a:p>
+            <a:pPr>
+              <a:spcAft>
+                <a:spcPts val="600"/>
+              </a:spcAft>
+              <a:defRPr sz="1200">
+                <a:solidFill>
+                  <a:srgbClr val="0F172A"/>
+                </a:solidFill>
+              </a:defRPr>
+            </a:pPr>
+            <a:r>
+              <a:t>✔ Home Agent intercepts packets using Proxy ARP and encapsulates them via IP-in-IP tunneling to the Care-of Address.</a:t>
+            </a:r>
+          </a:p>
+          <a:p>
+            <a:pPr>
+              <a:spcAft>
+                <a:spcPts val="600"/>
+              </a:spcAft>
+              <a:defRPr sz="1200">
+                <a:solidFill>
+                  <a:srgbClr val="0F172A"/>
+                </a:solidFill>
+              </a:defRPr>
+            </a:pPr>
+            <a:r>
+              <a:t>✔ Triangle routing introduces latency by routing all forward traffic through the Home Agent.</a:t>
+            </a:r>
+          </a:p>
+        </p:txBody>
+      </p:sp>
+      <p:sp>
+        <p:nvSpPr>
+          <p:cNvPr id="10" name="TextBox 9"/>
+          <p:cNvSpPr txBox="1"/>
+          <p:nvPr/>
+        </p:nvSpPr>
+        <p:spPr>
+          <a:xfrm>
+            <a:off x="731520" y="6327648"/>
+            <a:ext cx="10789920" cy="320040"/>
+          </a:xfrm>
+          <a:prstGeom prst="rect">
+            <a:avLst/>
+          </a:prstGeom>
+          <a:noFill/>
+        </p:spPr>
+        <p:txBody>
+          <a:bodyPr wrap="none">
+            <a:spAutoFit/>
+          </a:bodyPr>
+          <a:lstStyle/>
+          <a:p>
+            <a:pPr>
+              <a:defRPr sz="950">
+                <a:solidFill>
+                  <a:srgbClr val="64748B"/>
+                </a:solidFill>
+              </a:defRPr>
+            </a:pPr>
+            <a:r>
+              <a:t>PCCST501 Computer Networks | KTU 2024 Scheme | Prof. Anju Markose | Assistant Professor, Dept. of CSE | VJCET</a:t>
+            </a:r>
+          </a:p>
+        </p:txBody>
+      </p:sp>
+      <p:sp>
+        <p:nvSpPr>
+          <p:cNvPr id="11" name="TextBox 10"/>
+          <p:cNvSpPr txBox="1"/>
+          <p:nvPr/>
+        </p:nvSpPr>
+        <p:spPr>
+          <a:xfrm>
+            <a:off x="6858000" y="6327648"/>
+            <a:ext cx="4572000" cy="320040"/>
+          </a:xfrm>
+          <a:prstGeom prst="rect">
+            <a:avLst/>
+          </a:prstGeom>
+          <a:noFill/>
+        </p:spPr>
+        <p:txBody>
+          <a:bodyPr wrap="none">
+            <a:spAutoFit/>
+          </a:bodyPr>
+          <a:lstStyle/>
+          <a:p>
+            <a:pPr algn="r">
+              <a:defRPr sz="950">
+                <a:solidFill>
+                  <a:srgbClr val="64748B"/>
+                </a:solidFill>
+              </a:defRPr>
+            </a:pPr>
+            <a:r>
+              <a:t>Dept. of CSE, VJCET</a:t>
             </a:r>
           </a:p>
         </p:txBody>
